--- a/fixtures/sample-editor-theme.pptx
+++ b/fixtures/sample-editor-theme.pptx
@@ -317,6 +317,25 @@
             </a:r>
           </a:p>
         </p:txBody>
+      </p:sp>
+      <p:sp>
+        <p:nvSpPr>
+          <p:cNvPr id="95" name="版式末页链接">
+            <a:hlinkClick action="ppaction://hlinkshowjump?jump=lastslide"/>
+          </p:cNvPr>
+          <p:cNvSpPr/>
+          <p:nvPr/>
+        </p:nvSpPr>
+        <p:spPr>
+          <a:xfrm>
+            <a:off x="11239500" y="190500"/>
+            <a:ext cx="190500" cy="190500"/>
+          </a:xfrm>
+          <a:prstGeom prst="rect">
+            <a:avLst/>
+          </a:prstGeom>
+          <a:noFill/>
+        </p:spPr>
       </p:sp>
     </p:spTree>
   </p:cSld>

--- a/fixtures/sample-editor-theme.pptx
+++ b/fixtures/sample-editor-theme.pptx
@@ -766,7 +766,9 @@
       </p:grpSpPr>
       <p:sp>
         <p:nvSpPr>
-          <p:cNvPr id="160" name="目标母版标记"/>
+          <p:cNvPr id="160" name="目标母版标记">
+            <a:hlinkClick action="ppaction://hlinkshowjump?jump=lastslide"/>
+          </p:cNvPr>
           <p:cNvSpPr/>
           <p:nvPr/>
         </p:nvSpPr>
